--- a/courses/learn_placement/module01-01-hpwl-metrics/slides.pptx
+++ b/courses/learn_placement/module01-01-hpwl-metrics/slides.pptx
@@ -16,6 +16,9 @@
     <p:sldId id="264" r:id="rId16"/>
     <p:sldId id="265" r:id="rId17"/>
     <p:sldId id="266" r:id="rId18"/>
+    <p:sldId id="267" r:id="rId19"/>
+    <p:sldId id="268" r:id="rId20"/>
+    <p:sldId id="269" r:id="rId21"/>
   </p:sldIdLst>
   <p:sldSz cx="12191695" cy="6858000" type="screen4x3"/>
   <p:notesSz cx="6858000" cy="9144000"/>
@@ -582,7 +585,7 @@
           <a:lstStyle/>
           <a:p>
             <a:r>
-              <a:t>Common traps: celebrating HPWL while cells pile into one bin; ignoring fixed pads A and D; mixing bbox and clique models in one report; keeping only the final SA iterate instead of the best; and forgetting that timing weights change the objective, not just the label.</a:t>
+              <a:t>In the browser lab track, open the **hpwl-metrics** lab from the tools shelf. Load the starter placement, run the algorithm once, and read HPWL—and density when the panel shows it. Work the challenges that lock the goldens, then come back to implement the same loop yourself.</a:t>
             </a:r>
           </a:p>
         </p:txBody>
@@ -652,6 +655,146 @@
           <a:lstStyle/>
           <a:p>
             <a:r>
+              <a:t>In the implement track, open this module's EXAMPLES.md Pseudocode section and the course common solvers. Parse `tiny_place.json`, run the algorithm with a deterministic seed, and print coordinates plus HPWL. Match the browser goldens before you claim the checklist.</a:t>
+            </a:r>
+          </a:p>
+        </p:txBody>
+      </p:sp>
+      <p:sp>
+        <p:nvSpPr>
+          <p:cNvPr id="4" name="Slide Number Placeholder 3"/>
+          <p:cNvSpPr>
+            <a:spLocks noGrp="1"/>
+          </p:cNvSpPr>
+          <p:nvPr>
+            <p:ph type="sldNum" idx="5" sz="quarter"/>
+          </p:nvPr>
+        </p:nvSpPr>
+        <p:spPr/>
+      </p:sp>
+    </p:spTree>
+  </p:cSld>
+  <p:clrMapOvr>
+    <a:masterClrMapping/>
+  </p:clrMapOvr>
+</p:notes>
+</file>
+
+<file path=ppt/notesSlides/notesSlide12.xml><?xml version="1.0" encoding="utf-8"?>
+<p:notes xmlns:a="http://schemas.openxmlformats.org/drawingml/2006/main" xmlns:p="http://schemas.openxmlformats.org/presentationml/2006/main" xmlns:r="http://schemas.openxmlformats.org/officeDocument/2006/relationships">
+  <p:cSld>
+    <p:spTree>
+      <p:nvGrpSpPr>
+        <p:cNvPr id="1" name=""/>
+        <p:cNvGrpSpPr/>
+        <p:nvPr/>
+      </p:nvGrpSpPr>
+      <p:grpSpPr>
+        <a:xfrm>
+          <a:off x="0" y="0"/>
+          <a:ext cx="0" cy="0"/>
+          <a:chOff x="0" y="0"/>
+          <a:chExt cx="0" cy="0"/>
+        </a:xfrm>
+      </p:grpSpPr>
+      <p:sp>
+        <p:nvSpPr>
+          <p:cNvPr id="2" name="Slide Image Placeholder 1"/>
+          <p:cNvSpPr>
+            <a:spLocks noGrp="1"/>
+          </p:cNvSpPr>
+          <p:nvPr>
+            <p:ph type="sldImg" idx="2"/>
+          </p:nvPr>
+        </p:nvSpPr>
+        <p:spPr/>
+      </p:sp>
+      <p:sp>
+        <p:nvSpPr>
+          <p:cNvPr id="3" name="Notes Placeholder 2"/>
+          <p:cNvSpPr>
+            <a:spLocks noGrp="1"/>
+          </p:cNvSpPr>
+          <p:nvPr>
+            <p:ph type="body" idx="3" sz="quarter"/>
+          </p:nvPr>
+        </p:nvSpPr>
+        <p:spPr/>
+        <p:txBody>
+          <a:bodyPr/>
+          <a:lstStyle/>
+          <a:p>
+            <a:r>
+              <a:t>Common traps: celebrating HPWL while cells pile into one bin; ignoring fixed pads A and D; mixing bbox and clique models in one report; keeping only the final SA iterate instead of the best; and forgetting that timing weights change the objective, not just the label.</a:t>
+            </a:r>
+          </a:p>
+        </p:txBody>
+      </p:sp>
+      <p:sp>
+        <p:nvSpPr>
+          <p:cNvPr id="4" name="Slide Number Placeholder 3"/>
+          <p:cNvSpPr>
+            <a:spLocks noGrp="1"/>
+          </p:cNvSpPr>
+          <p:nvPr>
+            <p:ph type="sldNum" idx="5" sz="quarter"/>
+          </p:nvPr>
+        </p:nvSpPr>
+        <p:spPr/>
+      </p:sp>
+    </p:spTree>
+  </p:cSld>
+  <p:clrMapOvr>
+    <a:masterClrMapping/>
+  </p:clrMapOvr>
+</p:notes>
+</file>
+
+<file path=ppt/notesSlides/notesSlide13.xml><?xml version="1.0" encoding="utf-8"?>
+<p:notes xmlns:a="http://schemas.openxmlformats.org/drawingml/2006/main" xmlns:p="http://schemas.openxmlformats.org/presentationml/2006/main" xmlns:r="http://schemas.openxmlformats.org/officeDocument/2006/relationships">
+  <p:cSld>
+    <p:spTree>
+      <p:nvGrpSpPr>
+        <p:cNvPr id="1" name=""/>
+        <p:cNvGrpSpPr/>
+        <p:nvPr/>
+      </p:nvGrpSpPr>
+      <p:grpSpPr>
+        <a:xfrm>
+          <a:off x="0" y="0"/>
+          <a:ext cx="0" cy="0"/>
+          <a:chOff x="0" y="0"/>
+          <a:chExt cx="0" cy="0"/>
+        </a:xfrm>
+      </p:grpSpPr>
+      <p:sp>
+        <p:nvSpPr>
+          <p:cNvPr id="2" name="Slide Image Placeholder 1"/>
+          <p:cNvSpPr>
+            <a:spLocks noGrp="1"/>
+          </p:cNvSpPr>
+          <p:nvPr>
+            <p:ph type="sldImg" idx="2"/>
+          </p:nvPr>
+        </p:nvSpPr>
+        <p:spPr/>
+      </p:sp>
+      <p:sp>
+        <p:nvSpPr>
+          <p:cNvPr id="3" name="Notes Placeholder 2"/>
+          <p:cNvSpPr>
+            <a:spLocks noGrp="1"/>
+          </p:cNvSpPr>
+          <p:nvPr>
+            <p:ph type="body" idx="3" sz="quarter"/>
+          </p:nvPr>
+        </p:nvSpPr>
+        <p:spPr/>
+        <p:txBody>
+          <a:bodyPr/>
+          <a:lstStyle/>
+          <a:p>
+            <a:r>
               <a:t>Complete the checklist for at least one track—preferably both. Implement until your metrics match the starter goldens. When you’re ready, take the short quiz, then continue to the next module.</a:t>
             </a:r>
           </a:p>
@@ -725,12 +868,6 @@
               <a:t>For every net, find min and max x and y among its pins, then add (maxX minus minX) plus (maxY minus minY). Sum over nets for total HPWL. Never celebrate a tiny total that piles every cell on one point—that is not a usable placement, only a collapsed metric.</a:t>
             </a:r>
           </a:p>
-          <a:p/>
-          <a:p>
-            <a:r>
-              <a:t>&lt;!-- algorithm-walkthrough --&gt;</a:t>
-            </a:r>
-          </a:p>
         </p:txBody>
       </p:sp>
       <p:sp>
@@ -798,7 +935,13 @@
           <a:lstStyle/>
           <a:p>
             <a:r>
-              <a:t>Six cells A–F sit on a rough eight-by-eight canvas. The spread-out seed pulls nets long: total half-perimeter wirelength is fifty-two. This is the shared starter for every placement lab.</a:t>
+              <a:t>HPWL is one loop over nets: bounding-box width plus height, then sum. That sum is the teaching yardstick for every later placer.</a:t>
+            </a:r>
+          </a:p>
+          <a:p/>
+          <a:p>
+            <a:r>
+              <a:t>Open this module's examples file and find the Pseudocode section. That written sketch is what you implement on the implement track and what the browser challenges measure.</a:t>
             </a:r>
           </a:p>
         </p:txBody>
@@ -868,7 +1011,7 @@
           <a:lstStyle/>
           <a:p>
             <a:r>
-              <a:t>Net A–B alone has pins at (0,0) and (8,0). Width is eight, height is zero, so HPWL is eight. Every net uses the same bbox rule before you sum.</a:t>
+              <a:t>Starter placement scores fifty-two. Compact golden scores fourteen. Never celebrate a tiny total that piles every cell on one point.</a:t>
             </a:r>
           </a:p>
         </p:txBody>
@@ -938,7 +1081,7 @@
           <a:lstStyle/>
           <a:p>
             <a:r>
-              <a:t>Four two-pin nets at eight each, the four-pin ABCD net at sixteen, and E–F at four: eight times four plus sixteen plus four equals fifty-two. That is the starter golden.</a:t>
+              <a:t>Six cells A–F sit on a rough eight-by-eight canvas. The spread-out seed pulls nets long: total half-perimeter wirelength is fifty-two. This is the shared starter for every placement lab.</a:t>
             </a:r>
           </a:p>
         </p:txBody>
@@ -1008,7 +1151,7 @@
           <a:lstStyle/>
           <a:p>
             <a:r>
-              <a:t>The compact reference tucks A–D into a two-by-two block near the center. Same nets, shorter boxes: total HPWL falls from fifty-two to fourteen.</a:t>
+              <a:t>Net A–B alone has pins at (0,0) and (8,0). Width is eight, height is zero, so HPWL is eight. Every net uses the same bbox rule before you sum.</a:t>
             </a:r>
           </a:p>
         </p:txBody>
@@ -1078,13 +1221,7 @@
           <a:lstStyle/>
           <a:p>
             <a:r>
-              <a:t>Report total HPWL before and after every move. Fifty-two versus fourteen is the starter story—but a tiny total with stacked cells is not a usable placement.</a:t>
-            </a:r>
-          </a:p>
-          <a:p/>
-          <a:p>
-            <a:r>
-              <a:t>&lt;!-- /algorithm-walkthrough --&gt;</a:t>
+              <a:t>Four two-pin nets at eight each, the four-pin ABCD net at sixteen, and E–F at four: eight times four plus sixteen plus four equals fifty-two. That is the starter golden.</a:t>
             </a:r>
           </a:p>
         </p:txBody>
@@ -1154,7 +1291,7 @@
           <a:lstStyle/>
           <a:p>
             <a:r>
-              <a:t>In the browser lab track, open the **hpwl-metrics** lab from the tools shelf. Load the starter placement, run the algorithm once, and read HPWL—and density when the panel shows it. Work the challenges that lock the goldens, then come back to implement the same loop yourself.</a:t>
+              <a:t>The compact reference tucks A–D into a two-by-two block near the center. Same nets, shorter boxes: total HPWL falls from fifty-two to fourteen.</a:t>
             </a:r>
           </a:p>
         </p:txBody>
@@ -1224,7 +1361,7 @@
           <a:lstStyle/>
           <a:p>
             <a:r>
-              <a:t>In the implement track, open this module’s examples and the course `common/` solvers. Parse `tiny_place.json`, run the algorithm with a deterministic seed, and print coordinates plus HPWL. Match the browser goldens before you claim the checklist.</a:t>
+              <a:t>Report total HPWL before and after every move. Fifty-two versus fourteen is the starter story—but a tiny total with stacked cells is not a usable placement.</a:t>
             </a:r>
           </a:p>
         </p:txBody>
@@ -4382,21 +4519,45 @@
                 </a:solidFill>
                 <a:latin typeface="Calibri"/>
               </a:rPr>
-              <a:t>Pitfalls</a:t>
-            </a:r>
-          </a:p>
-        </p:txBody>
-      </p:sp>
-      <p:sp>
-        <p:nvSpPr>
-          <p:cNvPr id="3" name="TextBox 2"/>
+              <a:t>HPWL is the teaching yardstick</a:t>
+            </a:r>
+          </a:p>
+        </p:txBody>
+      </p:sp>
+      <p:pic>
+        <p:nvPicPr>
+          <p:cNvPr id="3" name="Picture 2" descr="05-takeaway.png"/>
+          <p:cNvPicPr>
+            <a:picLocks noChangeAspect="1"/>
+          </p:cNvPicPr>
+          <p:nvPr/>
+        </p:nvPicPr>
+        <p:blipFill>
+          <a:blip r:embed="rId2"/>
+          <a:stretch>
+            <a:fillRect/>
+          </a:stretch>
+        </p:blipFill>
+        <p:spPr>
+          <a:xfrm>
+            <a:off x="548640" y="1143000"/>
+            <a:ext cx="9404113" cy="4572000"/>
+          </a:xfrm>
+          <a:prstGeom prst="rect">
+            <a:avLst/>
+          </a:prstGeom>
+        </p:spPr>
+      </p:pic>
+      <p:sp>
+        <p:nvSpPr>
+          <p:cNvPr id="4" name="TextBox 3"/>
           <p:cNvSpPr txBox="1"/>
           <p:nvPr/>
         </p:nvSpPr>
         <p:spPr>
           <a:xfrm>
-            <a:off x="548640" y="1234440"/>
-            <a:ext cx="11064240" cy="4937760"/>
+            <a:off x="548640" y="5897880"/>
+            <a:ext cx="11064240" cy="411480"/>
           </a:xfrm>
           <a:prstGeom prst="rect">
             <a:avLst/>
@@ -4409,32 +4570,26 @@
           </a:bodyPr>
           <a:lstStyle/>
           <a:p>
-            <a:pPr lvl="0" marL="457200" indent="-228600">
-              <a:buFont typeface="Calibri"/>
-              <a:spcAft>
-                <a:spcPts val="1000"/>
-              </a:spcAft>
-              <a:buSzPct val="100000"/>
-              <a:buChar char="•"/>
+            <a:pPr>
               <a:lnSpc>
                 <a:spcPts val="2200"/>
               </a:lnSpc>
             </a:pPr>
             <a:r>
-              <a:rPr sz="2000" b="0">
+              <a:rPr sz="1200" b="0">
                 <a:solidFill>
                   <a:srgbClr val="333333"/>
                 </a:solidFill>
                 <a:latin typeface="Calibri"/>
               </a:rPr>
-              <a:t>Common traps</a:t>
-            </a:r>
-          </a:p>
-        </p:txBody>
-      </p:sp>
-      <p:sp>
-        <p:nvSpPr>
-          <p:cNvPr id="4" name="TextBox 3"/>
+              <a:t>HPWL is the teaching yardstick</a:t>
+            </a:r>
+          </a:p>
+        </p:txBody>
+      </p:sp>
+      <p:sp>
+        <p:nvSpPr>
+          <p:cNvPr id="5" name="TextBox 4"/>
           <p:cNvSpPr txBox="1"/>
           <p:nvPr/>
         </p:nvSpPr>
@@ -4523,6 +4678,535 @@
                 </a:solidFill>
                 <a:latin typeface="Calibri"/>
               </a:rPr>
+              <a:t>Browser lab track</a:t>
+            </a:r>
+          </a:p>
+        </p:txBody>
+      </p:sp>
+      <p:sp>
+        <p:nvSpPr>
+          <p:cNvPr id="3" name="TextBox 2"/>
+          <p:cNvSpPr txBox="1"/>
+          <p:nvPr/>
+        </p:nvSpPr>
+        <p:spPr>
+          <a:xfrm>
+            <a:off x="548640" y="1234440"/>
+            <a:ext cx="11064240" cy="4937760"/>
+          </a:xfrm>
+          <a:prstGeom prst="rect">
+            <a:avLst/>
+          </a:prstGeom>
+          <a:noFill/>
+        </p:spPr>
+        <p:txBody>
+          <a:bodyPr wrap="square">
+            <a:noAutofit/>
+          </a:bodyPr>
+          <a:lstStyle/>
+          <a:p>
+            <a:pPr lvl="0" marL="457200" indent="-228600">
+              <a:buFont typeface="Calibri"/>
+              <a:spcAft>
+                <a:spcPts val="1000"/>
+              </a:spcAft>
+              <a:buSzPct val="100000"/>
+              <a:buChar char="•"/>
+              <a:lnSpc>
+                <a:spcPts val="2200"/>
+              </a:lnSpc>
+            </a:pPr>
+            <a:r>
+              <a:rPr sz="2000" b="0">
+                <a:solidFill>
+                  <a:srgbClr val="333333"/>
+                </a:solidFill>
+                <a:latin typeface="Calibri"/>
+              </a:rPr>
+              <a:t>In the browser lab track, open the </a:t>
+            </a:r>
+            <a:r>
+              <a:rPr sz="2000" b="1">
+                <a:solidFill>
+                  <a:srgbClr val="333333"/>
+                </a:solidFill>
+                <a:latin typeface="Calibri"/>
+              </a:rPr>
+              <a:t>hpwl-metrics</a:t>
+            </a:r>
+            <a:r>
+              <a:rPr sz="2000" b="0">
+                <a:solidFill>
+                  <a:srgbClr val="333333"/>
+                </a:solidFill>
+                <a:latin typeface="Calibri"/>
+              </a:rPr>
+              <a:t> lab from the tools shelf</a:t>
+            </a:r>
+          </a:p>
+          <a:p>
+            <a:pPr lvl="0" marL="457200" indent="-228600">
+              <a:buFont typeface="Calibri"/>
+              <a:spcAft>
+                <a:spcPts val="1000"/>
+              </a:spcAft>
+              <a:buSzPct val="100000"/>
+              <a:buChar char="•"/>
+              <a:lnSpc>
+                <a:spcPts val="2200"/>
+              </a:lnSpc>
+            </a:pPr>
+            <a:r>
+              <a:rPr sz="2000" b="0">
+                <a:solidFill>
+                  <a:srgbClr val="333333"/>
+                </a:solidFill>
+                <a:latin typeface="Calibri"/>
+              </a:rPr>
+              <a:t>Load the starter placement, run the algorithm once</a:t>
+            </a:r>
+          </a:p>
+          <a:p>
+            <a:pPr lvl="0" marL="457200" indent="-228600">
+              <a:buFont typeface="Calibri"/>
+              <a:spcAft>
+                <a:spcPts val="1000"/>
+              </a:spcAft>
+              <a:buSzPct val="100000"/>
+              <a:buChar char="•"/>
+              <a:lnSpc>
+                <a:spcPts val="2200"/>
+              </a:lnSpc>
+            </a:pPr>
+            <a:r>
+              <a:rPr sz="2000" b="0">
+                <a:solidFill>
+                  <a:srgbClr val="333333"/>
+                </a:solidFill>
+                <a:latin typeface="Calibri"/>
+              </a:rPr>
+              <a:t>Work the challenges that lock the goldens</a:t>
+            </a:r>
+          </a:p>
+        </p:txBody>
+      </p:sp>
+      <p:sp>
+        <p:nvSpPr>
+          <p:cNvPr id="4" name="TextBox 3"/>
+          <p:cNvSpPr txBox="1"/>
+          <p:nvPr/>
+        </p:nvSpPr>
+        <p:spPr>
+          <a:xfrm>
+            <a:off x="548640" y="6355080"/>
+            <a:ext cx="11064240" cy="320040"/>
+          </a:xfrm>
+          <a:prstGeom prst="rect">
+            <a:avLst/>
+          </a:prstGeom>
+          <a:noFill/>
+        </p:spPr>
+        <p:txBody>
+          <a:bodyPr wrap="square">
+            <a:noAutofit/>
+          </a:bodyPr>
+          <a:lstStyle/>
+          <a:p>
+            <a:pPr algn="r">
+              <a:lnSpc>
+                <a:spcPts val="2200"/>
+              </a:lnSpc>
+              <a:defRPr sz="1000" b="0">
+                <a:solidFill>
+                  <a:srgbClr val="666666"/>
+                </a:solidFill>
+                <a:latin typeface="Calibri"/>
+              </a:defRPr>
+            </a:pPr>
+            <a:r>
+              <a:t>learn_placement — 01 hpwl metrics</a:t>
+            </a:r>
+          </a:p>
+        </p:txBody>
+      </p:sp>
+    </p:spTree>
+  </p:cSld>
+  <p:clrMapOvr>
+    <a:masterClrMapping/>
+  </p:clrMapOvr>
+</p:sld>
+</file>
+
+<file path=ppt/slides/slide12.xml><?xml version="1.0" encoding="utf-8"?>
+<p:sld xmlns:a="http://schemas.openxmlformats.org/drawingml/2006/main" xmlns:p="http://schemas.openxmlformats.org/presentationml/2006/main" xmlns:r="http://schemas.openxmlformats.org/officeDocument/2006/relationships">
+  <p:cSld>
+    <p:spTree>
+      <p:nvGrpSpPr>
+        <p:cNvPr id="1" name=""/>
+        <p:cNvGrpSpPr/>
+        <p:nvPr/>
+      </p:nvGrpSpPr>
+      <p:grpSpPr/>
+      <p:sp>
+        <p:nvSpPr>
+          <p:cNvPr id="2" name="TextBox 1"/>
+          <p:cNvSpPr txBox="1"/>
+          <p:nvPr/>
+        </p:nvSpPr>
+        <p:spPr>
+          <a:xfrm>
+            <a:off x="548640" y="411480"/>
+            <a:ext cx="11064240" cy="777240"/>
+          </a:xfrm>
+          <a:prstGeom prst="rect">
+            <a:avLst/>
+          </a:prstGeom>
+          <a:noFill/>
+        </p:spPr>
+        <p:txBody>
+          <a:bodyPr wrap="square">
+            <a:noAutofit/>
+          </a:bodyPr>
+          <a:lstStyle/>
+          <a:p>
+            <a:pPr>
+              <a:lnSpc>
+                <a:spcPts val="2200"/>
+              </a:lnSpc>
+            </a:pPr>
+            <a:r>
+              <a:rPr sz="2800" b="1">
+                <a:solidFill>
+                  <a:srgbClr val="1A1A2E"/>
+                </a:solidFill>
+                <a:latin typeface="Calibri"/>
+              </a:rPr>
+              <a:t>Implement track</a:t>
+            </a:r>
+          </a:p>
+        </p:txBody>
+      </p:sp>
+      <p:sp>
+        <p:nvSpPr>
+          <p:cNvPr id="3" name="TextBox 2"/>
+          <p:cNvSpPr txBox="1"/>
+          <p:nvPr/>
+        </p:nvSpPr>
+        <p:spPr>
+          <a:xfrm>
+            <a:off x="548640" y="1234440"/>
+            <a:ext cx="11064240" cy="4937760"/>
+          </a:xfrm>
+          <a:prstGeom prst="rect">
+            <a:avLst/>
+          </a:prstGeom>
+          <a:noFill/>
+        </p:spPr>
+        <p:txBody>
+          <a:bodyPr wrap="square">
+            <a:noAutofit/>
+          </a:bodyPr>
+          <a:lstStyle/>
+          <a:p>
+            <a:pPr lvl="0" marL="457200" indent="-228600">
+              <a:buFont typeface="Calibri"/>
+              <a:spcAft>
+                <a:spcPts val="1000"/>
+              </a:spcAft>
+              <a:buSzPct val="100000"/>
+              <a:buChar char="•"/>
+              <a:lnSpc>
+                <a:spcPts val="2200"/>
+              </a:lnSpc>
+            </a:pPr>
+            <a:r>
+              <a:rPr sz="2000" b="0">
+                <a:solidFill>
+                  <a:srgbClr val="333333"/>
+                </a:solidFill>
+                <a:latin typeface="Calibri"/>
+              </a:rPr>
+              <a:t>In the implement track</a:t>
+            </a:r>
+          </a:p>
+          <a:p>
+            <a:pPr lvl="0" marL="457200" indent="-228600">
+              <a:buFont typeface="Calibri"/>
+              <a:spcAft>
+                <a:spcPts val="1000"/>
+              </a:spcAft>
+              <a:buSzPct val="100000"/>
+              <a:buChar char="•"/>
+              <a:lnSpc>
+                <a:spcPts val="2200"/>
+              </a:lnSpc>
+            </a:pPr>
+            <a:r>
+              <a:rPr sz="2000" b="0">
+                <a:solidFill>
+                  <a:srgbClr val="333333"/>
+                </a:solidFill>
+                <a:latin typeface="Calibri"/>
+              </a:rPr>
+              <a:t>Parse `tiny_place.json`, run the algorithm with a deterministic seed</a:t>
+            </a:r>
+          </a:p>
+          <a:p>
+            <a:pPr lvl="0" marL="457200" indent="-228600">
+              <a:buFont typeface="Calibri"/>
+              <a:spcAft>
+                <a:spcPts val="1000"/>
+              </a:spcAft>
+              <a:buSzPct val="100000"/>
+              <a:buChar char="•"/>
+              <a:lnSpc>
+                <a:spcPts val="2200"/>
+              </a:lnSpc>
+            </a:pPr>
+            <a:r>
+              <a:rPr sz="2000" b="0">
+                <a:solidFill>
+                  <a:srgbClr val="333333"/>
+                </a:solidFill>
+                <a:latin typeface="Calibri"/>
+              </a:rPr>
+              <a:t>Match the browser goldens before you claim the checklist</a:t>
+            </a:r>
+          </a:p>
+        </p:txBody>
+      </p:sp>
+      <p:sp>
+        <p:nvSpPr>
+          <p:cNvPr id="4" name="TextBox 3"/>
+          <p:cNvSpPr txBox="1"/>
+          <p:nvPr/>
+        </p:nvSpPr>
+        <p:spPr>
+          <a:xfrm>
+            <a:off x="548640" y="6355080"/>
+            <a:ext cx="11064240" cy="320040"/>
+          </a:xfrm>
+          <a:prstGeom prst="rect">
+            <a:avLst/>
+          </a:prstGeom>
+          <a:noFill/>
+        </p:spPr>
+        <p:txBody>
+          <a:bodyPr wrap="square">
+            <a:noAutofit/>
+          </a:bodyPr>
+          <a:lstStyle/>
+          <a:p>
+            <a:pPr algn="r">
+              <a:lnSpc>
+                <a:spcPts val="2200"/>
+              </a:lnSpc>
+              <a:defRPr sz="1000" b="0">
+                <a:solidFill>
+                  <a:srgbClr val="666666"/>
+                </a:solidFill>
+                <a:latin typeface="Calibri"/>
+              </a:defRPr>
+            </a:pPr>
+            <a:r>
+              <a:t>learn_placement — 01 hpwl metrics</a:t>
+            </a:r>
+          </a:p>
+        </p:txBody>
+      </p:sp>
+    </p:spTree>
+  </p:cSld>
+  <p:clrMapOvr>
+    <a:masterClrMapping/>
+  </p:clrMapOvr>
+</p:sld>
+</file>
+
+<file path=ppt/slides/slide13.xml><?xml version="1.0" encoding="utf-8"?>
+<p:sld xmlns:a="http://schemas.openxmlformats.org/drawingml/2006/main" xmlns:p="http://schemas.openxmlformats.org/presentationml/2006/main" xmlns:r="http://schemas.openxmlformats.org/officeDocument/2006/relationships">
+  <p:cSld>
+    <p:spTree>
+      <p:nvGrpSpPr>
+        <p:cNvPr id="1" name=""/>
+        <p:cNvGrpSpPr/>
+        <p:nvPr/>
+      </p:nvGrpSpPr>
+      <p:grpSpPr/>
+      <p:sp>
+        <p:nvSpPr>
+          <p:cNvPr id="2" name="TextBox 1"/>
+          <p:cNvSpPr txBox="1"/>
+          <p:nvPr/>
+        </p:nvSpPr>
+        <p:spPr>
+          <a:xfrm>
+            <a:off x="548640" y="411480"/>
+            <a:ext cx="11064240" cy="777240"/>
+          </a:xfrm>
+          <a:prstGeom prst="rect">
+            <a:avLst/>
+          </a:prstGeom>
+          <a:noFill/>
+        </p:spPr>
+        <p:txBody>
+          <a:bodyPr wrap="square">
+            <a:noAutofit/>
+          </a:bodyPr>
+          <a:lstStyle/>
+          <a:p>
+            <a:pPr>
+              <a:lnSpc>
+                <a:spcPts val="2200"/>
+              </a:lnSpc>
+            </a:pPr>
+            <a:r>
+              <a:rPr sz="2800" b="1">
+                <a:solidFill>
+                  <a:srgbClr val="1A1A2E"/>
+                </a:solidFill>
+                <a:latin typeface="Calibri"/>
+              </a:rPr>
+              <a:t>Pitfalls</a:t>
+            </a:r>
+          </a:p>
+        </p:txBody>
+      </p:sp>
+      <p:sp>
+        <p:nvSpPr>
+          <p:cNvPr id="3" name="TextBox 2"/>
+          <p:cNvSpPr txBox="1"/>
+          <p:nvPr/>
+        </p:nvSpPr>
+        <p:spPr>
+          <a:xfrm>
+            <a:off x="548640" y="1234440"/>
+            <a:ext cx="11064240" cy="4937760"/>
+          </a:xfrm>
+          <a:prstGeom prst="rect">
+            <a:avLst/>
+          </a:prstGeom>
+          <a:noFill/>
+        </p:spPr>
+        <p:txBody>
+          <a:bodyPr wrap="square">
+            <a:noAutofit/>
+          </a:bodyPr>
+          <a:lstStyle/>
+          <a:p>
+            <a:pPr lvl="0" marL="457200" indent="-228600">
+              <a:buFont typeface="Calibri"/>
+              <a:spcAft>
+                <a:spcPts val="1000"/>
+              </a:spcAft>
+              <a:buSzPct val="100000"/>
+              <a:buChar char="•"/>
+              <a:lnSpc>
+                <a:spcPts val="2200"/>
+              </a:lnSpc>
+            </a:pPr>
+            <a:r>
+              <a:rPr sz="2000" b="0">
+                <a:solidFill>
+                  <a:srgbClr val="333333"/>
+                </a:solidFill>
+                <a:latin typeface="Calibri"/>
+              </a:rPr>
+              <a:t>Common traps</a:t>
+            </a:r>
+          </a:p>
+        </p:txBody>
+      </p:sp>
+      <p:sp>
+        <p:nvSpPr>
+          <p:cNvPr id="4" name="TextBox 3"/>
+          <p:cNvSpPr txBox="1"/>
+          <p:nvPr/>
+        </p:nvSpPr>
+        <p:spPr>
+          <a:xfrm>
+            <a:off x="548640" y="6355080"/>
+            <a:ext cx="11064240" cy="320040"/>
+          </a:xfrm>
+          <a:prstGeom prst="rect">
+            <a:avLst/>
+          </a:prstGeom>
+          <a:noFill/>
+        </p:spPr>
+        <p:txBody>
+          <a:bodyPr wrap="square">
+            <a:noAutofit/>
+          </a:bodyPr>
+          <a:lstStyle/>
+          <a:p>
+            <a:pPr algn="r">
+              <a:lnSpc>
+                <a:spcPts val="2200"/>
+              </a:lnSpc>
+              <a:defRPr sz="1000" b="0">
+                <a:solidFill>
+                  <a:srgbClr val="666666"/>
+                </a:solidFill>
+                <a:latin typeface="Calibri"/>
+              </a:defRPr>
+            </a:pPr>
+            <a:r>
+              <a:t>learn_placement — 01 hpwl metrics</a:t>
+            </a:r>
+          </a:p>
+        </p:txBody>
+      </p:sp>
+    </p:spTree>
+  </p:cSld>
+  <p:clrMapOvr>
+    <a:masterClrMapping/>
+  </p:clrMapOvr>
+</p:sld>
+</file>
+
+<file path=ppt/slides/slide14.xml><?xml version="1.0" encoding="utf-8"?>
+<p:sld xmlns:a="http://schemas.openxmlformats.org/drawingml/2006/main" xmlns:p="http://schemas.openxmlformats.org/presentationml/2006/main" xmlns:r="http://schemas.openxmlformats.org/officeDocument/2006/relationships">
+  <p:cSld>
+    <p:spTree>
+      <p:nvGrpSpPr>
+        <p:cNvPr id="1" name=""/>
+        <p:cNvGrpSpPr/>
+        <p:nvPr/>
+      </p:nvGrpSpPr>
+      <p:grpSpPr/>
+      <p:sp>
+        <p:nvSpPr>
+          <p:cNvPr id="2" name="TextBox 1"/>
+          <p:cNvSpPr txBox="1"/>
+          <p:nvPr/>
+        </p:nvSpPr>
+        <p:spPr>
+          <a:xfrm>
+            <a:off x="548640" y="411480"/>
+            <a:ext cx="11064240" cy="777240"/>
+          </a:xfrm>
+          <a:prstGeom prst="rect">
+            <a:avLst/>
+          </a:prstGeom>
+          <a:noFill/>
+        </p:spPr>
+        <p:txBody>
+          <a:bodyPr wrap="square">
+            <a:noAutofit/>
+          </a:bodyPr>
+          <a:lstStyle/>
+          <a:p>
+            <a:pPr>
+              <a:lnSpc>
+                <a:spcPts val="2200"/>
+              </a:lnSpc>
+            </a:pPr>
+            <a:r>
+              <a:rPr sz="2800" b="1">
+                <a:solidFill>
+                  <a:srgbClr val="1A1A2E"/>
+                </a:solidFill>
+                <a:latin typeface="Calibri"/>
+              </a:rPr>
               <a:t>Your turn</a:t>
             </a:r>
           </a:p>
@@ -4800,6 +5484,125 @@
               <a:t>Never celebrate a tiny total that piles every cell on one point</a:t>
             </a:r>
           </a:p>
+        </p:txBody>
+      </p:sp>
+      <p:sp>
+        <p:nvSpPr>
+          <p:cNvPr id="4" name="TextBox 3"/>
+          <p:cNvSpPr txBox="1"/>
+          <p:nvPr/>
+        </p:nvSpPr>
+        <p:spPr>
+          <a:xfrm>
+            <a:off x="548640" y="6355080"/>
+            <a:ext cx="11064240" cy="320040"/>
+          </a:xfrm>
+          <a:prstGeom prst="rect">
+            <a:avLst/>
+          </a:prstGeom>
+          <a:noFill/>
+        </p:spPr>
+        <p:txBody>
+          <a:bodyPr wrap="square">
+            <a:noAutofit/>
+          </a:bodyPr>
+          <a:lstStyle/>
+          <a:p>
+            <a:pPr algn="r">
+              <a:lnSpc>
+                <a:spcPts val="2200"/>
+              </a:lnSpc>
+              <a:defRPr sz="1000" b="0">
+                <a:solidFill>
+                  <a:srgbClr val="666666"/>
+                </a:solidFill>
+                <a:latin typeface="Calibri"/>
+              </a:defRPr>
+            </a:pPr>
+            <a:r>
+              <a:t>learn_placement — 01 hpwl metrics</a:t>
+            </a:r>
+          </a:p>
+        </p:txBody>
+      </p:sp>
+    </p:spTree>
+  </p:cSld>
+  <p:clrMapOvr>
+    <a:masterClrMapping/>
+  </p:clrMapOvr>
+</p:sld>
+</file>
+
+<file path=ppt/slides/slide3.xml><?xml version="1.0" encoding="utf-8"?>
+<p:sld xmlns:a="http://schemas.openxmlformats.org/drawingml/2006/main" xmlns:p="http://schemas.openxmlformats.org/presentationml/2006/main" xmlns:r="http://schemas.openxmlformats.org/officeDocument/2006/relationships">
+  <p:cSld>
+    <p:spTree>
+      <p:nvGrpSpPr>
+        <p:cNvPr id="1" name=""/>
+        <p:cNvGrpSpPr/>
+        <p:nvPr/>
+      </p:nvGrpSpPr>
+      <p:grpSpPr/>
+      <p:sp>
+        <p:nvSpPr>
+          <p:cNvPr id="2" name="TextBox 1"/>
+          <p:cNvSpPr txBox="1"/>
+          <p:nvPr/>
+        </p:nvSpPr>
+        <p:spPr>
+          <a:xfrm>
+            <a:off x="548640" y="411480"/>
+            <a:ext cx="11064240" cy="777240"/>
+          </a:xfrm>
+          <a:prstGeom prst="rect">
+            <a:avLst/>
+          </a:prstGeom>
+          <a:noFill/>
+        </p:spPr>
+        <p:txBody>
+          <a:bodyPr wrap="square">
+            <a:noAutofit/>
+          </a:bodyPr>
+          <a:lstStyle/>
+          <a:p>
+            <a:pPr>
+              <a:lnSpc>
+                <a:spcPts val="2200"/>
+              </a:lnSpc>
+            </a:pPr>
+            <a:r>
+              <a:rPr sz="2800" b="1">
+                <a:solidFill>
+                  <a:srgbClr val="1A1A2E"/>
+                </a:solidFill>
+                <a:latin typeface="Calibri"/>
+              </a:rPr>
+              <a:t>Pseudocode</a:t>
+            </a:r>
+          </a:p>
+        </p:txBody>
+      </p:sp>
+      <p:sp>
+        <p:nvSpPr>
+          <p:cNvPr id="3" name="TextBox 2"/>
+          <p:cNvSpPr txBox="1"/>
+          <p:nvPr/>
+        </p:nvSpPr>
+        <p:spPr>
+          <a:xfrm>
+            <a:off x="548640" y="1234440"/>
+            <a:ext cx="11064240" cy="4937760"/>
+          </a:xfrm>
+          <a:prstGeom prst="rect">
+            <a:avLst/>
+          </a:prstGeom>
+          <a:noFill/>
+        </p:spPr>
+        <p:txBody>
+          <a:bodyPr wrap="square">
+            <a:noAutofit/>
+          </a:bodyPr>
+          <a:lstStyle/>
           <a:p>
             <a:pPr lvl="0" marL="457200" indent="-228600">
               <a:buFont typeface="Calibri"/>
@@ -4819,7 +5622,73 @@
                 </a:solidFill>
                 <a:latin typeface="Calibri"/>
               </a:rPr>
-              <a:t>&lt;!-- algorithm-walkthrough --&gt;</a:t>
+              <a:t>HPWL is one loop over nets: bounding-box width plus height, then sum</a:t>
+            </a:r>
+          </a:p>
+          <a:p>
+            <a:pPr lvl="0" marL="457200" indent="-228600">
+              <a:buFont typeface="Calibri"/>
+              <a:spcAft>
+                <a:spcPts val="1000"/>
+              </a:spcAft>
+              <a:buSzPct val="100000"/>
+              <a:buChar char="•"/>
+              <a:lnSpc>
+                <a:spcPts val="2200"/>
+              </a:lnSpc>
+            </a:pPr>
+            <a:r>
+              <a:rPr sz="2000" b="0">
+                <a:solidFill>
+                  <a:srgbClr val="333333"/>
+                </a:solidFill>
+                <a:latin typeface="Calibri"/>
+              </a:rPr>
+              <a:t>That sum is the teaching yardstick for every later placer</a:t>
+            </a:r>
+          </a:p>
+          <a:p>
+            <a:pPr lvl="0" marL="457200" indent="-228600">
+              <a:buFont typeface="Calibri"/>
+              <a:spcAft>
+                <a:spcPts val="1000"/>
+              </a:spcAft>
+              <a:buSzPct val="100000"/>
+              <a:buChar char="•"/>
+              <a:lnSpc>
+                <a:spcPts val="2200"/>
+              </a:lnSpc>
+            </a:pPr>
+            <a:r>
+              <a:rPr sz="2000" b="0">
+                <a:solidFill>
+                  <a:srgbClr val="333333"/>
+                </a:solidFill>
+                <a:latin typeface="Calibri"/>
+              </a:rPr>
+              <a:t>Open this module's examples file and find the Pseudocode section</a:t>
+            </a:r>
+          </a:p>
+          <a:p>
+            <a:pPr lvl="0" marL="457200" indent="-228600">
+              <a:buFont typeface="Calibri"/>
+              <a:spcAft>
+                <a:spcPts val="1000"/>
+              </a:spcAft>
+              <a:buSzPct val="100000"/>
+              <a:buChar char="•"/>
+              <a:lnSpc>
+                <a:spcPts val="2200"/>
+              </a:lnSpc>
+            </a:pPr>
+            <a:r>
+              <a:rPr sz="2000" b="0">
+                <a:solidFill>
+                  <a:srgbClr val="333333"/>
+                </a:solidFill>
+                <a:latin typeface="Calibri"/>
+              </a:rPr>
+              <a:t>That written sketch is what you implement on the implement track and what the browser</a:t>
             </a:r>
           </a:p>
         </p:txBody>
@@ -4871,7 +5740,427 @@
 </p:sld>
 </file>
 
-<file path=ppt/slides/slide3.xml><?xml version="1.0" encoding="utf-8"?>
+<file path=ppt/slides/slide4.xml><?xml version="1.0" encoding="utf-8"?>
+<p:sld xmlns:a="http://schemas.openxmlformats.org/drawingml/2006/main" xmlns:p="http://schemas.openxmlformats.org/presentationml/2006/main" xmlns:r="http://schemas.openxmlformats.org/officeDocument/2006/relationships">
+  <p:cSld>
+    <p:spTree>
+      <p:nvGrpSpPr>
+        <p:cNvPr id="1" name=""/>
+        <p:cNvGrpSpPr/>
+        <p:nvPr/>
+      </p:nvGrpSpPr>
+      <p:grpSpPr/>
+      <p:sp>
+        <p:nvSpPr>
+          <p:cNvPr id="2" name="TextBox 1"/>
+          <p:cNvSpPr txBox="1"/>
+          <p:nvPr/>
+        </p:nvSpPr>
+        <p:spPr>
+          <a:xfrm>
+            <a:off x="548640" y="411480"/>
+            <a:ext cx="11064240" cy="777240"/>
+          </a:xfrm>
+          <a:prstGeom prst="rect">
+            <a:avLst/>
+          </a:prstGeom>
+          <a:noFill/>
+        </p:spPr>
+        <p:txBody>
+          <a:bodyPr wrap="square">
+            <a:noAutofit/>
+          </a:bodyPr>
+          <a:lstStyle/>
+          <a:p>
+            <a:pPr>
+              <a:lnSpc>
+                <a:spcPts val="2200"/>
+              </a:lnSpc>
+            </a:pPr>
+            <a:r>
+              <a:rPr sz="2800" b="1">
+                <a:solidFill>
+                  <a:srgbClr val="1A1A2E"/>
+                </a:solidFill>
+                <a:latin typeface="Calibri"/>
+              </a:rPr>
+              <a:t>Algorithm sketch</a:t>
+            </a:r>
+          </a:p>
+        </p:txBody>
+      </p:sp>
+      <p:sp>
+        <p:nvSpPr>
+          <p:cNvPr id="3" name="TextBox 2"/>
+          <p:cNvSpPr txBox="1"/>
+          <p:nvPr/>
+        </p:nvSpPr>
+        <p:spPr>
+          <a:xfrm>
+            <a:off x="548640" y="1234440"/>
+            <a:ext cx="11064240" cy="4937760"/>
+          </a:xfrm>
+          <a:prstGeom prst="rect">
+            <a:avLst/>
+          </a:prstGeom>
+          <a:noFill/>
+        </p:spPr>
+        <p:txBody>
+          <a:bodyPr wrap="square">
+            <a:noAutofit/>
+          </a:bodyPr>
+          <a:lstStyle/>
+          <a:p>
+            <a:pPr lvl="0" marL="457200" indent="-228600">
+              <a:buFont typeface="Calibri"/>
+              <a:spcAft>
+                <a:spcPts val="1000"/>
+              </a:spcAft>
+              <a:buSzPct val="100000"/>
+              <a:buChar char="•"/>
+              <a:lnSpc>
+                <a:spcPts val="2200"/>
+              </a:lnSpc>
+            </a:pPr>
+            <a:r>
+              <a:rPr sz="2000" b="0">
+                <a:solidFill>
+                  <a:srgbClr val="333333"/>
+                </a:solidFill>
+                <a:latin typeface="Calibri"/>
+              </a:rPr>
+              <a:t>Starter placement scores fifty-two</a:t>
+            </a:r>
+          </a:p>
+          <a:p>
+            <a:pPr lvl="0" marL="457200" indent="-228600">
+              <a:buFont typeface="Calibri"/>
+              <a:spcAft>
+                <a:spcPts val="1000"/>
+              </a:spcAft>
+              <a:buSzPct val="100000"/>
+              <a:buChar char="•"/>
+              <a:lnSpc>
+                <a:spcPts val="2200"/>
+              </a:lnSpc>
+            </a:pPr>
+            <a:r>
+              <a:rPr sz="2000" b="0">
+                <a:solidFill>
+                  <a:srgbClr val="333333"/>
+                </a:solidFill>
+                <a:latin typeface="Calibri"/>
+              </a:rPr>
+              <a:t>Compact golden scores fourteen</a:t>
+            </a:r>
+          </a:p>
+          <a:p>
+            <a:pPr lvl="0" marL="457200" indent="-228600">
+              <a:buFont typeface="Calibri"/>
+              <a:spcAft>
+                <a:spcPts val="1000"/>
+              </a:spcAft>
+              <a:buSzPct val="100000"/>
+              <a:buChar char="•"/>
+              <a:lnSpc>
+                <a:spcPts val="2200"/>
+              </a:lnSpc>
+            </a:pPr>
+            <a:r>
+              <a:rPr sz="2000" b="0">
+                <a:solidFill>
+                  <a:srgbClr val="333333"/>
+                </a:solidFill>
+                <a:latin typeface="Calibri"/>
+              </a:rPr>
+              <a:t>Never celebrate a tiny total that piles every cell on one point</a:t>
+            </a:r>
+          </a:p>
+        </p:txBody>
+      </p:sp>
+      <p:sp>
+        <p:nvSpPr>
+          <p:cNvPr id="4" name="TextBox 3"/>
+          <p:cNvSpPr txBox="1"/>
+          <p:nvPr/>
+        </p:nvSpPr>
+        <p:spPr>
+          <a:xfrm>
+            <a:off x="548640" y="6355080"/>
+            <a:ext cx="11064240" cy="320040"/>
+          </a:xfrm>
+          <a:prstGeom prst="rect">
+            <a:avLst/>
+          </a:prstGeom>
+          <a:noFill/>
+        </p:spPr>
+        <p:txBody>
+          <a:bodyPr wrap="square">
+            <a:noAutofit/>
+          </a:bodyPr>
+          <a:lstStyle/>
+          <a:p>
+            <a:pPr algn="r">
+              <a:lnSpc>
+                <a:spcPts val="2200"/>
+              </a:lnSpc>
+              <a:defRPr sz="1000" b="0">
+                <a:solidFill>
+                  <a:srgbClr val="666666"/>
+                </a:solidFill>
+                <a:latin typeface="Calibri"/>
+              </a:defRPr>
+            </a:pPr>
+            <a:r>
+              <a:t>learn_placement — 01 hpwl metrics</a:t>
+            </a:r>
+          </a:p>
+        </p:txBody>
+      </p:sp>
+    </p:spTree>
+  </p:cSld>
+  <p:clrMapOvr>
+    <a:masterClrMapping/>
+  </p:clrMapOvr>
+</p:sld>
+</file>
+
+<file path=ppt/slides/slide5.xml><?xml version="1.0" encoding="utf-8"?>
+<p:sld xmlns:a="http://schemas.openxmlformats.org/drawingml/2006/main" xmlns:p="http://schemas.openxmlformats.org/presentationml/2006/main" xmlns:r="http://schemas.openxmlformats.org/officeDocument/2006/relationships">
+  <p:cSld>
+    <p:spTree>
+      <p:nvGrpSpPr>
+        <p:cNvPr id="1" name=""/>
+        <p:cNvGrpSpPr/>
+        <p:nvPr/>
+      </p:nvGrpSpPr>
+      <p:grpSpPr/>
+      <p:sp>
+        <p:nvSpPr>
+          <p:cNvPr id="2" name="TextBox 1"/>
+          <p:cNvSpPr txBox="1"/>
+          <p:nvPr/>
+        </p:nvSpPr>
+        <p:spPr>
+          <a:xfrm>
+            <a:off x="548640" y="411480"/>
+            <a:ext cx="11064240" cy="777240"/>
+          </a:xfrm>
+          <a:prstGeom prst="rect">
+            <a:avLst/>
+          </a:prstGeom>
+          <a:noFill/>
+        </p:spPr>
+        <p:txBody>
+          <a:bodyPr wrap="square">
+            <a:noAutofit/>
+          </a:bodyPr>
+          <a:lstStyle/>
+          <a:p>
+            <a:pPr>
+              <a:lnSpc>
+                <a:spcPts val="2200"/>
+              </a:lnSpc>
+            </a:pPr>
+            <a:r>
+              <a:rPr sz="2800" b="1">
+                <a:solidFill>
+                  <a:srgbClr val="1A1A2E"/>
+                </a:solidFill>
+                <a:latin typeface="Calibri"/>
+              </a:rPr>
+              <a:t>Algorithm sketch — try these</a:t>
+            </a:r>
+          </a:p>
+        </p:txBody>
+      </p:sp>
+      <p:sp>
+        <p:nvSpPr>
+          <p:cNvPr id="3" name="TextBox 2"/>
+          <p:cNvSpPr txBox="1"/>
+          <p:nvPr/>
+        </p:nvSpPr>
+        <p:spPr>
+          <a:xfrm>
+            <a:off x="548640" y="1143000"/>
+            <a:ext cx="11064240" cy="5029200"/>
+          </a:xfrm>
+          <a:prstGeom prst="rect">
+            <a:avLst/>
+          </a:prstGeom>
+          <a:solidFill>
+            <a:srgbClr val="F4F4F4"/>
+          </a:solidFill>
+        </p:spPr>
+        <p:txBody>
+          <a:bodyPr wrap="square">
+            <a:noAutofit/>
+          </a:bodyPr>
+          <a:lstStyle/>
+          <a:p>
+            <a:pPr>
+              <a:lnSpc>
+                <a:spcPts val="2200"/>
+              </a:lnSpc>
+              <a:spcAft>
+                <a:spcPts val="400"/>
+              </a:spcAft>
+            </a:pPr>
+            <a:r>
+              <a:rPr sz="2000" b="0">
+                <a:solidFill>
+                  <a:srgbClr val="333333"/>
+                </a:solidFill>
+                <a:latin typeface="Consolas"/>
+              </a:rPr>
+              <a:t>INPUT: positions, nets</a:t>
+            </a:r>
+          </a:p>
+          <a:p>
+            <a:pPr>
+              <a:lnSpc>
+                <a:spcPts val="2200"/>
+              </a:lnSpc>
+              <a:spcAft>
+                <a:spcPts val="400"/>
+              </a:spcAft>
+            </a:pPr>
+            <a:r>
+              <a:rPr sz="2000" b="0">
+                <a:solidFill>
+                  <a:srgbClr val="333333"/>
+                </a:solidFill>
+                <a:latin typeface="Consolas"/>
+              </a:rPr>
+              <a:t>OUTPUT: total HPWL</a:t>
+            </a:r>
+          </a:p>
+          <a:p>
+            <a:pPr>
+              <a:lnSpc>
+                <a:spcPts val="2200"/>
+              </a:lnSpc>
+              <a:spcAft>
+                <a:spcPts val="400"/>
+              </a:spcAft>
+            </a:pPr>
+            <a:r>
+              <a:rPr sz="2000" b="0">
+                <a:solidFill>
+                  <a:srgbClr val="333333"/>
+                </a:solidFill>
+                <a:latin typeface="Consolas"/>
+              </a:rPr>
+              <a:t>for each net: bbox → (maxx−minx)+(maxy−miny)</a:t>
+            </a:r>
+          </a:p>
+          <a:p>
+            <a:pPr>
+              <a:lnSpc>
+                <a:spcPts val="2200"/>
+              </a:lnSpc>
+              <a:spcAft>
+                <a:spcPts val="400"/>
+              </a:spcAft>
+            </a:pPr>
+            <a:r>
+              <a:rPr sz="2000" b="0">
+                <a:solidFill>
+                  <a:srgbClr val="333333"/>
+                </a:solidFill>
+                <a:latin typeface="Consolas"/>
+              </a:rPr>
+              <a:t>total ← Σ net HPWL</a:t>
+            </a:r>
+          </a:p>
+          <a:p>
+            <a:pPr>
+              <a:lnSpc>
+                <a:spcPts val="2200"/>
+              </a:lnSpc>
+              <a:spcAft>
+                <a:spcPts val="400"/>
+              </a:spcAft>
+            </a:pPr>
+            <a:r>
+              <a:rPr sz="2000" b="0">
+                <a:solidFill>
+                  <a:srgbClr val="333333"/>
+                </a:solidFill>
+                <a:latin typeface="Consolas"/>
+              </a:rPr>
+              <a:t>GOLDEN starter=52; compact=14</a:t>
+            </a:r>
+          </a:p>
+          <a:p>
+            <a:pPr>
+              <a:lnSpc>
+                <a:spcPts val="2200"/>
+              </a:lnSpc>
+              <a:spcAft>
+                <a:spcPts val="400"/>
+              </a:spcAft>
+            </a:pPr>
+            <a:r>
+              <a:rPr sz="2000" b="0">
+                <a:solidFill>
+                  <a:srgbClr val="333333"/>
+                </a:solidFill>
+                <a:latin typeface="Consolas"/>
+              </a:rPr>
+              <a:t>NOTE: collapsed point ≠ usable place</a:t>
+            </a:r>
+          </a:p>
+        </p:txBody>
+      </p:sp>
+      <p:sp>
+        <p:nvSpPr>
+          <p:cNvPr id="4" name="TextBox 3"/>
+          <p:cNvSpPr txBox="1"/>
+          <p:nvPr/>
+        </p:nvSpPr>
+        <p:spPr>
+          <a:xfrm>
+            <a:off x="548640" y="6355080"/>
+            <a:ext cx="11064240" cy="320040"/>
+          </a:xfrm>
+          <a:prstGeom prst="rect">
+            <a:avLst/>
+          </a:prstGeom>
+          <a:noFill/>
+        </p:spPr>
+        <p:txBody>
+          <a:bodyPr wrap="square">
+            <a:noAutofit/>
+          </a:bodyPr>
+          <a:lstStyle/>
+          <a:p>
+            <a:pPr algn="r">
+              <a:lnSpc>
+                <a:spcPts val="2200"/>
+              </a:lnSpc>
+              <a:defRPr sz="1000" b="0">
+                <a:solidFill>
+                  <a:srgbClr val="666666"/>
+                </a:solidFill>
+                <a:latin typeface="Calibri"/>
+              </a:defRPr>
+            </a:pPr>
+            <a:r>
+              <a:t>learn_placement — 01 hpwl metrics</a:t>
+            </a:r>
+          </a:p>
+        </p:txBody>
+      </p:sp>
+    </p:spTree>
+  </p:cSld>
+  <p:clrMapOvr>
+    <a:masterClrMapping/>
+  </p:clrMapOvr>
+</p:sld>
+</file>
+
+<file path=ppt/slides/slide6.xml><?xml version="1.0" encoding="utf-8"?>
 <p:sld xmlns:a="http://schemas.openxmlformats.org/drawingml/2006/main" xmlns:p="http://schemas.openxmlformats.org/presentationml/2006/main" xmlns:r="http://schemas.openxmlformats.org/officeDocument/2006/relationships">
   <p:cSld>
     <p:spTree>
@@ -5030,7 +6319,7 @@
 </p:sld>
 </file>
 
-<file path=ppt/slides/slide4.xml><?xml version="1.0" encoding="utf-8"?>
+<file path=ppt/slides/slide7.xml><?xml version="1.0" encoding="utf-8"?>
 <p:sld xmlns:a="http://schemas.openxmlformats.org/drawingml/2006/main" xmlns:p="http://schemas.openxmlformats.org/presentationml/2006/main" xmlns:r="http://schemas.openxmlformats.org/officeDocument/2006/relationships">
   <p:cSld>
     <p:spTree>
@@ -5189,7 +6478,7 @@
 </p:sld>
 </file>
 
-<file path=ppt/slides/slide5.xml><?xml version="1.0" encoding="utf-8"?>
+<file path=ppt/slides/slide8.xml><?xml version="1.0" encoding="utf-8"?>
 <p:sld xmlns:a="http://schemas.openxmlformats.org/drawingml/2006/main" xmlns:p="http://schemas.openxmlformats.org/presentationml/2006/main" xmlns:r="http://schemas.openxmlformats.org/officeDocument/2006/relationships">
   <p:cSld>
     <p:spTree>
@@ -5348,7 +6637,7 @@
 </p:sld>
 </file>
 
-<file path=ppt/slides/slide6.xml><?xml version="1.0" encoding="utf-8"?>
+<file path=ppt/slides/slide9.xml><?xml version="1.0" encoding="utf-8"?>
 <p:sld xmlns:a="http://schemas.openxmlformats.org/drawingml/2006/main" xmlns:p="http://schemas.openxmlformats.org/presentationml/2006/main" xmlns:r="http://schemas.openxmlformats.org/officeDocument/2006/relationships">
   <p:cSld>
     <p:spTree>
@@ -5463,553 +6752,6 @@
       <p:sp>
         <p:nvSpPr>
           <p:cNvPr id="5" name="TextBox 4"/>
-          <p:cNvSpPr txBox="1"/>
-          <p:nvPr/>
-        </p:nvSpPr>
-        <p:spPr>
-          <a:xfrm>
-            <a:off x="548640" y="6355080"/>
-            <a:ext cx="11064240" cy="320040"/>
-          </a:xfrm>
-          <a:prstGeom prst="rect">
-            <a:avLst/>
-          </a:prstGeom>
-          <a:noFill/>
-        </p:spPr>
-        <p:txBody>
-          <a:bodyPr wrap="square">
-            <a:noAutofit/>
-          </a:bodyPr>
-          <a:lstStyle/>
-          <a:p>
-            <a:pPr algn="r">
-              <a:lnSpc>
-                <a:spcPts val="2200"/>
-              </a:lnSpc>
-              <a:defRPr sz="1000" b="0">
-                <a:solidFill>
-                  <a:srgbClr val="666666"/>
-                </a:solidFill>
-                <a:latin typeface="Calibri"/>
-              </a:defRPr>
-            </a:pPr>
-            <a:r>
-              <a:t>learn_placement — 01 hpwl metrics</a:t>
-            </a:r>
-          </a:p>
-        </p:txBody>
-      </p:sp>
-    </p:spTree>
-  </p:cSld>
-  <p:clrMapOvr>
-    <a:masterClrMapping/>
-  </p:clrMapOvr>
-</p:sld>
-</file>
-
-<file path=ppt/slides/slide7.xml><?xml version="1.0" encoding="utf-8"?>
-<p:sld xmlns:a="http://schemas.openxmlformats.org/drawingml/2006/main" xmlns:p="http://schemas.openxmlformats.org/presentationml/2006/main" xmlns:r="http://schemas.openxmlformats.org/officeDocument/2006/relationships">
-  <p:cSld>
-    <p:spTree>
-      <p:nvGrpSpPr>
-        <p:cNvPr id="1" name=""/>
-        <p:cNvGrpSpPr/>
-        <p:nvPr/>
-      </p:nvGrpSpPr>
-      <p:grpSpPr/>
-      <p:sp>
-        <p:nvSpPr>
-          <p:cNvPr id="2" name="TextBox 1"/>
-          <p:cNvSpPr txBox="1"/>
-          <p:nvPr/>
-        </p:nvSpPr>
-        <p:spPr>
-          <a:xfrm>
-            <a:off x="548640" y="411480"/>
-            <a:ext cx="11064240" cy="777240"/>
-          </a:xfrm>
-          <a:prstGeom prst="rect">
-            <a:avLst/>
-          </a:prstGeom>
-          <a:noFill/>
-        </p:spPr>
-        <p:txBody>
-          <a:bodyPr wrap="square">
-            <a:noAutofit/>
-          </a:bodyPr>
-          <a:lstStyle/>
-          <a:p>
-            <a:pPr>
-              <a:lnSpc>
-                <a:spcPts val="2200"/>
-              </a:lnSpc>
-            </a:pPr>
-            <a:r>
-              <a:rPr sz="2800" b="1">
-                <a:solidFill>
-                  <a:srgbClr val="1A1A2E"/>
-                </a:solidFill>
-                <a:latin typeface="Calibri"/>
-              </a:rPr>
-              <a:t>HPWL is the teaching yardstick</a:t>
-            </a:r>
-          </a:p>
-        </p:txBody>
-      </p:sp>
-      <p:pic>
-        <p:nvPicPr>
-          <p:cNvPr id="3" name="Picture 2" descr="05-takeaway.png"/>
-          <p:cNvPicPr>
-            <a:picLocks noChangeAspect="1"/>
-          </p:cNvPicPr>
-          <p:nvPr/>
-        </p:nvPicPr>
-        <p:blipFill>
-          <a:blip r:embed="rId2"/>
-          <a:stretch>
-            <a:fillRect/>
-          </a:stretch>
-        </p:blipFill>
-        <p:spPr>
-          <a:xfrm>
-            <a:off x="548640" y="1143000"/>
-            <a:ext cx="9404113" cy="4572000"/>
-          </a:xfrm>
-          <a:prstGeom prst="rect">
-            <a:avLst/>
-          </a:prstGeom>
-        </p:spPr>
-      </p:pic>
-      <p:sp>
-        <p:nvSpPr>
-          <p:cNvPr id="4" name="TextBox 3"/>
-          <p:cNvSpPr txBox="1"/>
-          <p:nvPr/>
-        </p:nvSpPr>
-        <p:spPr>
-          <a:xfrm>
-            <a:off x="548640" y="5897880"/>
-            <a:ext cx="11064240" cy="411480"/>
-          </a:xfrm>
-          <a:prstGeom prst="rect">
-            <a:avLst/>
-          </a:prstGeom>
-          <a:noFill/>
-        </p:spPr>
-        <p:txBody>
-          <a:bodyPr wrap="square">
-            <a:noAutofit/>
-          </a:bodyPr>
-          <a:lstStyle/>
-          <a:p>
-            <a:pPr>
-              <a:lnSpc>
-                <a:spcPts val="2200"/>
-              </a:lnSpc>
-            </a:pPr>
-            <a:r>
-              <a:rPr sz="1200" b="0">
-                <a:solidFill>
-                  <a:srgbClr val="333333"/>
-                </a:solidFill>
-                <a:latin typeface="Calibri"/>
-              </a:rPr>
-              <a:t>HPWL is the teaching yardstick</a:t>
-            </a:r>
-          </a:p>
-        </p:txBody>
-      </p:sp>
-      <p:sp>
-        <p:nvSpPr>
-          <p:cNvPr id="5" name="TextBox 4"/>
-          <p:cNvSpPr txBox="1"/>
-          <p:nvPr/>
-        </p:nvSpPr>
-        <p:spPr>
-          <a:xfrm>
-            <a:off x="548640" y="6355080"/>
-            <a:ext cx="11064240" cy="320040"/>
-          </a:xfrm>
-          <a:prstGeom prst="rect">
-            <a:avLst/>
-          </a:prstGeom>
-          <a:noFill/>
-        </p:spPr>
-        <p:txBody>
-          <a:bodyPr wrap="square">
-            <a:noAutofit/>
-          </a:bodyPr>
-          <a:lstStyle/>
-          <a:p>
-            <a:pPr algn="r">
-              <a:lnSpc>
-                <a:spcPts val="2200"/>
-              </a:lnSpc>
-              <a:defRPr sz="1000" b="0">
-                <a:solidFill>
-                  <a:srgbClr val="666666"/>
-                </a:solidFill>
-                <a:latin typeface="Calibri"/>
-              </a:defRPr>
-            </a:pPr>
-            <a:r>
-              <a:t>learn_placement — 01 hpwl metrics</a:t>
-            </a:r>
-          </a:p>
-        </p:txBody>
-      </p:sp>
-    </p:spTree>
-  </p:cSld>
-  <p:clrMapOvr>
-    <a:masterClrMapping/>
-  </p:clrMapOvr>
-</p:sld>
-</file>
-
-<file path=ppt/slides/slide8.xml><?xml version="1.0" encoding="utf-8"?>
-<p:sld xmlns:a="http://schemas.openxmlformats.org/drawingml/2006/main" xmlns:p="http://schemas.openxmlformats.org/presentationml/2006/main" xmlns:r="http://schemas.openxmlformats.org/officeDocument/2006/relationships">
-  <p:cSld>
-    <p:spTree>
-      <p:nvGrpSpPr>
-        <p:cNvPr id="1" name=""/>
-        <p:cNvGrpSpPr/>
-        <p:nvPr/>
-      </p:nvGrpSpPr>
-      <p:grpSpPr/>
-      <p:sp>
-        <p:nvSpPr>
-          <p:cNvPr id="2" name="TextBox 1"/>
-          <p:cNvSpPr txBox="1"/>
-          <p:nvPr/>
-        </p:nvSpPr>
-        <p:spPr>
-          <a:xfrm>
-            <a:off x="548640" y="411480"/>
-            <a:ext cx="11064240" cy="777240"/>
-          </a:xfrm>
-          <a:prstGeom prst="rect">
-            <a:avLst/>
-          </a:prstGeom>
-          <a:noFill/>
-        </p:spPr>
-        <p:txBody>
-          <a:bodyPr wrap="square">
-            <a:noAutofit/>
-          </a:bodyPr>
-          <a:lstStyle/>
-          <a:p>
-            <a:pPr>
-              <a:lnSpc>
-                <a:spcPts val="2200"/>
-              </a:lnSpc>
-            </a:pPr>
-            <a:r>
-              <a:rPr sz="2800" b="1">
-                <a:solidFill>
-                  <a:srgbClr val="1A1A2E"/>
-                </a:solidFill>
-                <a:latin typeface="Calibri"/>
-              </a:rPr>
-              <a:t>Browser lab track</a:t>
-            </a:r>
-          </a:p>
-        </p:txBody>
-      </p:sp>
-      <p:sp>
-        <p:nvSpPr>
-          <p:cNvPr id="3" name="TextBox 2"/>
-          <p:cNvSpPr txBox="1"/>
-          <p:nvPr/>
-        </p:nvSpPr>
-        <p:spPr>
-          <a:xfrm>
-            <a:off x="548640" y="1234440"/>
-            <a:ext cx="11064240" cy="4937760"/>
-          </a:xfrm>
-          <a:prstGeom prst="rect">
-            <a:avLst/>
-          </a:prstGeom>
-          <a:noFill/>
-        </p:spPr>
-        <p:txBody>
-          <a:bodyPr wrap="square">
-            <a:noAutofit/>
-          </a:bodyPr>
-          <a:lstStyle/>
-          <a:p>
-            <a:pPr lvl="0" marL="457200" indent="-228600">
-              <a:buFont typeface="Calibri"/>
-              <a:spcAft>
-                <a:spcPts val="1000"/>
-              </a:spcAft>
-              <a:buSzPct val="100000"/>
-              <a:buChar char="•"/>
-              <a:lnSpc>
-                <a:spcPts val="2200"/>
-              </a:lnSpc>
-            </a:pPr>
-            <a:r>
-              <a:rPr sz="2000" b="0">
-                <a:solidFill>
-                  <a:srgbClr val="333333"/>
-                </a:solidFill>
-                <a:latin typeface="Calibri"/>
-              </a:rPr>
-              <a:t>In the browser lab track, open the </a:t>
-            </a:r>
-            <a:r>
-              <a:rPr sz="2000" b="1">
-                <a:solidFill>
-                  <a:srgbClr val="333333"/>
-                </a:solidFill>
-                <a:latin typeface="Calibri"/>
-              </a:rPr>
-              <a:t>hpwl-metrics</a:t>
-            </a:r>
-            <a:r>
-              <a:rPr sz="2000" b="0">
-                <a:solidFill>
-                  <a:srgbClr val="333333"/>
-                </a:solidFill>
-                <a:latin typeface="Calibri"/>
-              </a:rPr>
-              <a:t> lab from the tools shelf</a:t>
-            </a:r>
-          </a:p>
-          <a:p>
-            <a:pPr lvl="0" marL="457200" indent="-228600">
-              <a:buFont typeface="Calibri"/>
-              <a:spcAft>
-                <a:spcPts val="1000"/>
-              </a:spcAft>
-              <a:buSzPct val="100000"/>
-              <a:buChar char="•"/>
-              <a:lnSpc>
-                <a:spcPts val="2200"/>
-              </a:lnSpc>
-            </a:pPr>
-            <a:r>
-              <a:rPr sz="2000" b="0">
-                <a:solidFill>
-                  <a:srgbClr val="333333"/>
-                </a:solidFill>
-                <a:latin typeface="Calibri"/>
-              </a:rPr>
-              <a:t>Load the starter placement, run the algorithm once</a:t>
-            </a:r>
-          </a:p>
-          <a:p>
-            <a:pPr lvl="0" marL="457200" indent="-228600">
-              <a:buFont typeface="Calibri"/>
-              <a:spcAft>
-                <a:spcPts val="1000"/>
-              </a:spcAft>
-              <a:buSzPct val="100000"/>
-              <a:buChar char="•"/>
-              <a:lnSpc>
-                <a:spcPts val="2200"/>
-              </a:lnSpc>
-            </a:pPr>
-            <a:r>
-              <a:rPr sz="2000" b="0">
-                <a:solidFill>
-                  <a:srgbClr val="333333"/>
-                </a:solidFill>
-                <a:latin typeface="Calibri"/>
-              </a:rPr>
-              <a:t>Work the challenges that lock the goldens</a:t>
-            </a:r>
-          </a:p>
-        </p:txBody>
-      </p:sp>
-      <p:sp>
-        <p:nvSpPr>
-          <p:cNvPr id="4" name="TextBox 3"/>
-          <p:cNvSpPr txBox="1"/>
-          <p:nvPr/>
-        </p:nvSpPr>
-        <p:spPr>
-          <a:xfrm>
-            <a:off x="548640" y="6355080"/>
-            <a:ext cx="11064240" cy="320040"/>
-          </a:xfrm>
-          <a:prstGeom prst="rect">
-            <a:avLst/>
-          </a:prstGeom>
-          <a:noFill/>
-        </p:spPr>
-        <p:txBody>
-          <a:bodyPr wrap="square">
-            <a:noAutofit/>
-          </a:bodyPr>
-          <a:lstStyle/>
-          <a:p>
-            <a:pPr algn="r">
-              <a:lnSpc>
-                <a:spcPts val="2200"/>
-              </a:lnSpc>
-              <a:defRPr sz="1000" b="0">
-                <a:solidFill>
-                  <a:srgbClr val="666666"/>
-                </a:solidFill>
-                <a:latin typeface="Calibri"/>
-              </a:defRPr>
-            </a:pPr>
-            <a:r>
-              <a:t>learn_placement — 01 hpwl metrics</a:t>
-            </a:r>
-          </a:p>
-        </p:txBody>
-      </p:sp>
-    </p:spTree>
-  </p:cSld>
-  <p:clrMapOvr>
-    <a:masterClrMapping/>
-  </p:clrMapOvr>
-</p:sld>
-</file>
-
-<file path=ppt/slides/slide9.xml><?xml version="1.0" encoding="utf-8"?>
-<p:sld xmlns:a="http://schemas.openxmlformats.org/drawingml/2006/main" xmlns:p="http://schemas.openxmlformats.org/presentationml/2006/main" xmlns:r="http://schemas.openxmlformats.org/officeDocument/2006/relationships">
-  <p:cSld>
-    <p:spTree>
-      <p:nvGrpSpPr>
-        <p:cNvPr id="1" name=""/>
-        <p:cNvGrpSpPr/>
-        <p:nvPr/>
-      </p:nvGrpSpPr>
-      <p:grpSpPr/>
-      <p:sp>
-        <p:nvSpPr>
-          <p:cNvPr id="2" name="TextBox 1"/>
-          <p:cNvSpPr txBox="1"/>
-          <p:nvPr/>
-        </p:nvSpPr>
-        <p:spPr>
-          <a:xfrm>
-            <a:off x="548640" y="411480"/>
-            <a:ext cx="11064240" cy="777240"/>
-          </a:xfrm>
-          <a:prstGeom prst="rect">
-            <a:avLst/>
-          </a:prstGeom>
-          <a:noFill/>
-        </p:spPr>
-        <p:txBody>
-          <a:bodyPr wrap="square">
-            <a:noAutofit/>
-          </a:bodyPr>
-          <a:lstStyle/>
-          <a:p>
-            <a:pPr>
-              <a:lnSpc>
-                <a:spcPts val="2200"/>
-              </a:lnSpc>
-            </a:pPr>
-            <a:r>
-              <a:rPr sz="2800" b="1">
-                <a:solidFill>
-                  <a:srgbClr val="1A1A2E"/>
-                </a:solidFill>
-                <a:latin typeface="Calibri"/>
-              </a:rPr>
-              <a:t>Implement track</a:t>
-            </a:r>
-          </a:p>
-        </p:txBody>
-      </p:sp>
-      <p:sp>
-        <p:nvSpPr>
-          <p:cNvPr id="3" name="TextBox 2"/>
-          <p:cNvSpPr txBox="1"/>
-          <p:nvPr/>
-        </p:nvSpPr>
-        <p:spPr>
-          <a:xfrm>
-            <a:off x="548640" y="1234440"/>
-            <a:ext cx="11064240" cy="4937760"/>
-          </a:xfrm>
-          <a:prstGeom prst="rect">
-            <a:avLst/>
-          </a:prstGeom>
-          <a:noFill/>
-        </p:spPr>
-        <p:txBody>
-          <a:bodyPr wrap="square">
-            <a:noAutofit/>
-          </a:bodyPr>
-          <a:lstStyle/>
-          <a:p>
-            <a:pPr lvl="0" marL="457200" indent="-228600">
-              <a:buFont typeface="Calibri"/>
-              <a:spcAft>
-                <a:spcPts val="1000"/>
-              </a:spcAft>
-              <a:buSzPct val="100000"/>
-              <a:buChar char="•"/>
-              <a:lnSpc>
-                <a:spcPts val="2200"/>
-              </a:lnSpc>
-            </a:pPr>
-            <a:r>
-              <a:rPr sz="2000" b="0">
-                <a:solidFill>
-                  <a:srgbClr val="333333"/>
-                </a:solidFill>
-                <a:latin typeface="Calibri"/>
-              </a:rPr>
-              <a:t>In the implement track, open this module’s examples and the course `common/` solvers</a:t>
-            </a:r>
-          </a:p>
-          <a:p>
-            <a:pPr lvl="0" marL="457200" indent="-228600">
-              <a:buFont typeface="Calibri"/>
-              <a:spcAft>
-                <a:spcPts val="1000"/>
-              </a:spcAft>
-              <a:buSzPct val="100000"/>
-              <a:buChar char="•"/>
-              <a:lnSpc>
-                <a:spcPts val="2200"/>
-              </a:lnSpc>
-            </a:pPr>
-            <a:r>
-              <a:rPr sz="2000" b="0">
-                <a:solidFill>
-                  <a:srgbClr val="333333"/>
-                </a:solidFill>
-                <a:latin typeface="Calibri"/>
-              </a:rPr>
-              <a:t>Parse `tiny_place.json`, run the algorithm with a deterministic seed</a:t>
-            </a:r>
-          </a:p>
-          <a:p>
-            <a:pPr lvl="0" marL="457200" indent="-228600">
-              <a:buFont typeface="Calibri"/>
-              <a:spcAft>
-                <a:spcPts val="1000"/>
-              </a:spcAft>
-              <a:buSzPct val="100000"/>
-              <a:buChar char="•"/>
-              <a:lnSpc>
-                <a:spcPts val="2200"/>
-              </a:lnSpc>
-            </a:pPr>
-            <a:r>
-              <a:rPr sz="2000" b="0">
-                <a:solidFill>
-                  <a:srgbClr val="333333"/>
-                </a:solidFill>
-                <a:latin typeface="Calibri"/>
-              </a:rPr>
-              <a:t>Match the browser goldens before you claim the checklist</a:t>
-            </a:r>
-          </a:p>
-        </p:txBody>
-      </p:sp>
-      <p:sp>
-        <p:nvSpPr>
-          <p:cNvPr id="4" name="TextBox 3"/>
           <p:cNvSpPr txBox="1"/>
           <p:nvPr/>
         </p:nvSpPr>
